--- a/docs/investor-materials/v1.5/corporate-travel-concierge/CTDI-pitch-deck-corporate-travel-concierge.pptx
+++ b/docs/investor-materials/v1.5/corporate-travel-concierge/CTDI-pitch-deck-corporate-travel-concierge.pptx
@@ -3380,7 +3380,7 @@
               <a:defRPr sz="1800"/>
             </a:pPr>
             <a:r>
-              <a:t>Business Source License 1.1, Licensor [operator LLC], LLC — free always for non-production use</a:t>
+              <a:t>Business Source License 1.1, Licensor CS Executive Services, LLC — free always for non-production use</a:t>
             </a:r>
           </a:p>
           <a:p>
@@ -3776,7 +3776,7 @@
               <a:defRPr sz="1800"/>
             </a:pPr>
             <a:r>
-              <a:t>[operator LLC], LLC · Arlington, VA · Investor briefing — August 2026</a:t>
+              <a:t>CS Executive Services, LLC · Arlington, VA · Investor briefing — August 2026</a:t>
             </a:r>
           </a:p>
           <a:p>
